--- a/src/Tests/Samples.VerifyPresentationDocument.verified.pptx
+++ b/src/Tests/Samples.VerifyPresentationDocument.verified.pptx
@@ -2,10 +2,10 @@
 <file path=ppt/presentation.xml><?xml version="1.0" encoding="utf-8"?>
 <p:presentation xmlns:p="http://schemas.openxmlformats.org/presentationml/2006/main">
   <p:sldMasterIdLst>
-    <p:sldMasterId xmlns:r="http://schemas.openxmlformats.org/officeDocument/2006/relationships" id="2147483648" r:id="smRid1"/>
+    <p:sldMasterId xmlns:r="http://schemas.openxmlformats.org/officeDocument/2006/relationships" id="2147483648" r:id="DeterministicId2"/>
   </p:sldMasterIdLst>
   <p:sldIdLst>
-    <p:sldId xmlns:r="http://schemas.openxmlformats.org/officeDocument/2006/relationships" id="256" r:id="sldRid1"/>
+    <p:sldId xmlns:r="http://schemas.openxmlformats.org/officeDocument/2006/relationships" id="256" r:id="DeterministicId1"/>
   </p:sldIdLst>
   <p:sldSz cx="9144000" cy="6858000"/>
   <p:notesSz cx="6858000" cy="9144000"/>
@@ -53,7 +53,7 @@
   </p:cSld>
   <p:clrMap bg1="lt1" tx1="dk1" bg2="lt2" tx2="dk2" accent1="accent1" accent2="accent2" accent3="accent3" accent4="accent4" accent5="accent5" accent6="accent6" hlink="hlink" folHlink="folHlink"/>
   <p:sldLayoutIdLst>
-    <p:sldLayoutId xmlns:r="http://schemas.openxmlformats.org/officeDocument/2006/relationships" id="2147483649" r:id="slRid1"/>
+    <p:sldLayoutId xmlns:r="http://schemas.openxmlformats.org/officeDocument/2006/relationships" id="2147483649" r:id="DeterministicId1"/>
   </p:sldLayoutIdLst>
 </p:sldMaster>
 </file>
